--- a/data/employees/EMP024/AST-EMP024-01.pptx
+++ b/data/employees/EMP024/AST-EMP024-01.pptx
@@ -9,6 +9,7 @@
     <p:sldId id="257" r:id="rId8"/>
     <p:sldId id="258" r:id="rId9"/>
     <p:sldId id="259" r:id="rId10"/>
+    <p:sldId id="260" r:id="rId11"/>
   </p:sldIdLst>
   <p:sldSz cx="9144000" cy="6858000" type="screen4x3"/>
   <p:notesSz cx="6858000" cy="9144000"/>
@@ -3098,42 +3099,55 @@
             <a:spLocks noGrp="1"/>
           </p:cNvSpPr>
           <p:nvPr>
-            <p:ph type="ctrTitle"/>
-          </p:nvPr>
-        </p:nvSpPr>
-        <p:spPr/>
-        <p:txBody>
-          <a:bodyPr/>
-          <a:lstStyle/>
-          <a:p>
-            <a:r>
-              <a:t>Project update deck - EMP024</a:t>
-            </a:r>
-          </a:p>
-        </p:txBody>
-      </p:sp>
-      <p:sp>
-        <p:nvSpPr>
-          <p:cNvPr id="3" name="Subtitle 2"/>
-          <p:cNvSpPr>
-            <a:spLocks noGrp="1"/>
-          </p:cNvSpPr>
-          <p:nvPr>
-            <p:ph type="subTitle" idx="1"/>
-          </p:nvPr>
-        </p:nvSpPr>
-        <p:spPr/>
-        <p:txBody>
-          <a:bodyPr/>
-          <a:lstStyle/>
-          <a:p>
-            <a:r>
-              <a:t>Morgan Smith | Engineer | Engineering</a:t>
-            </a:r>
-          </a:p>
-          <a:p>
-            <a:r>
-              <a:t>Prepared: 2025-01-26</a:t>
+            <p:ph type="title"/>
+          </p:nvPr>
+        </p:nvSpPr>
+        <p:spPr/>
+        <p:txBody>
+          <a:bodyPr/>
+          <a:lstStyle/>
+          <a:p>
+            <a:r>
+              <a:t>Ast Emp024 01 - EMP024</a:t>
+            </a:r>
+          </a:p>
+        </p:txBody>
+      </p:sp>
+      <p:sp>
+        <p:nvSpPr>
+          <p:cNvPr id="3" name="Content Placeholder 2"/>
+          <p:cNvSpPr>
+            <a:spLocks noGrp="1"/>
+          </p:cNvSpPr>
+          <p:nvPr>
+            <p:ph idx="1"/>
+          </p:nvPr>
+        </p:nvSpPr>
+        <p:spPr/>
+        <p:txBody>
+          <a:bodyPr/>
+          <a:lstStyle/>
+          <a:p>
+            <a:r>
+              <a:t>Slide 1: Executive Summary</a:t>
+            </a:r>
+          </a:p>
+          <a:p>
+            <a:pPr lvl="1"/>
+            <a:r>
+              <a:t>Section 1: Data quality remediation. EMP024 contributes to ast emp024 01 through recurring collaboration, clear ownership boundaries, and measurable outcomes. The team captures decisions, open issues, and handoffs so that knowledge remains discoverable for future programs.</a:t>
+            </a:r>
+          </a:p>
+          <a:p>
+            <a:pPr lvl="1"/>
+            <a:r>
+              <a:t>Section 2: Fabric semantic model planning. EMP024 contributes to ast emp024 01 through recurring collaboration, clear ownership boundaries, and measurable outcomes. The team captures decisions, open issues, and handoffs so that knowledge remains discoverable for future programs.</a:t>
+            </a:r>
+          </a:p>
+          <a:p>
+            <a:pPr lvl="1"/>
+            <a:r>
+              <a:t>Section 3: Department KPI performance. EMP024 contributes to ast emp024 01 through recurring collaboration, clear ownership boundaries, and measurable outcomes. The team captures decisions, open issues, and handoffs so that knowledge remains discoverable for future programs.</a:t>
             </a:r>
           </a:p>
         </p:txBody>
@@ -3172,7 +3186,7 @@
           <a:lstStyle/>
           <a:p>
             <a:r>
-              <a:t>Sprint Velocity Trends</a:t>
+              <a:t>Ast Emp024 01 - EMP024</a:t>
             </a:r>
           </a:p>
         </p:txBody>
@@ -3193,17 +3207,25 @@
           <a:lstStyle/>
           <a:p>
             <a:r>
-              <a:t>Overview of Sprint Velocity Trends for Engineering department.</a:t>
-            </a:r>
-          </a:p>
-          <a:p>
-            <a:r>
-              <a:t>Responsible: Morgan Smith (Engineer)</a:t>
-            </a:r>
-          </a:p>
-          <a:p>
-            <a:r>
-              <a:t>Location: Fremont | Skills: Kusto, SQL, Power BI, Synapse</a:t>
+              <a:t>Slide 2: Executive Summary</a:t>
+            </a:r>
+          </a:p>
+          <a:p>
+            <a:pPr lvl="1"/>
+            <a:r>
+              <a:t>Section 1: Automation backlog refinement. EMP024 contributes to ast emp024 01 through recurring collaboration, clear ownership boundaries, and measurable outcomes. The team captures decisions, open issues, and handoffs so that knowledge remains discoverable for future programs.</a:t>
+            </a:r>
+          </a:p>
+          <a:p>
+            <a:pPr lvl="1"/>
+            <a:r>
+              <a:t>Section 2: Data quality remediation. EMP024 contributes to ast emp024 01 through recurring collaboration, clear ownership boundaries, and measurable outcomes. The team captures decisions, open issues, and handoffs so that knowledge remains discoverable for future programs.</a:t>
+            </a:r>
+          </a:p>
+          <a:p>
+            <a:pPr lvl="1"/>
+            <a:r>
+              <a:t>Section 3: Quarterly delivery milestones. EMP024 contributes to ast emp024 01 through recurring collaboration, clear ownership boundaries, and measurable outcomes. The team captures decisions, open issues, and handoffs so that knowledge remains discoverable for future programs.</a:t>
             </a:r>
           </a:p>
         </p:txBody>
@@ -3242,7 +3264,7 @@
           <a:lstStyle/>
           <a:p>
             <a:r>
-              <a:t>Technical Debt Dashboard</a:t>
+              <a:t>Ast Emp024 01 - EMP024</a:t>
             </a:r>
           </a:p>
         </p:txBody>
@@ -3263,17 +3285,25 @@
           <a:lstStyle/>
           <a:p>
             <a:r>
-              <a:t>Overview of Technical Debt Dashboard for Engineering department.</a:t>
-            </a:r>
-          </a:p>
-          <a:p>
-            <a:r>
-              <a:t>Responsible: Morgan Smith (Engineer)</a:t>
-            </a:r>
-          </a:p>
-          <a:p>
-            <a:r>
-              <a:t>Location: Fremont | Skills: Kusto, SQL, Power BI, Synapse</a:t>
+              <a:t>Slide 3: Executive Summary</a:t>
+            </a:r>
+          </a:p>
+          <a:p>
+            <a:pPr lvl="1"/>
+            <a:r>
+              <a:t>Section 1: Fabric semantic model planning. EMP024 contributes to ast emp024 01 through recurring collaboration, clear ownership boundaries, and measurable outcomes. The team captures decisions, open issues, and handoffs so that knowledge remains discoverable for future programs.</a:t>
+            </a:r>
+          </a:p>
+          <a:p>
+            <a:pPr lvl="1"/>
+            <a:r>
+              <a:t>Section 2: Department KPI performance. EMP024 contributes to ast emp024 01 through recurring collaboration, clear ownership boundaries, and measurable outcomes. The team captures decisions, open issues, and handoffs so that knowledge remains discoverable for future programs.</a:t>
+            </a:r>
+          </a:p>
+          <a:p>
+            <a:pPr lvl="1"/>
+            <a:r>
+              <a:t>Section 3: Operational risk review. EMP024 contributes to ast emp024 01 through recurring collaboration, clear ownership boundaries, and measurable outcomes. The team captures decisions, open issues, and handoffs so that knowledge remains discoverable for future programs.</a:t>
             </a:r>
           </a:p>
         </p:txBody>
@@ -3312,7 +3342,7 @@
           <a:lstStyle/>
           <a:p>
             <a:r>
-              <a:t>Architecture Review Outcomes</a:t>
+              <a:t>Ast Emp024 01 - EMP024</a:t>
             </a:r>
           </a:p>
         </p:txBody>
@@ -3333,17 +3363,103 @@
           <a:lstStyle/>
           <a:p>
             <a:r>
-              <a:t>Overview of Architecture Review Outcomes for Engineering department.</a:t>
-            </a:r>
-          </a:p>
-          <a:p>
-            <a:r>
-              <a:t>Responsible: Morgan Smith (Engineer)</a:t>
-            </a:r>
-          </a:p>
-          <a:p>
-            <a:r>
-              <a:t>Location: Fremont | Skills: Kusto, SQL, Power BI, Synapse</a:t>
+              <a:t>Slide 4: Executive Summary</a:t>
+            </a:r>
+          </a:p>
+          <a:p>
+            <a:pPr lvl="1"/>
+            <a:r>
+              <a:t>Section 1: Operational risk review. EMP024 contributes to ast emp024 01 through recurring collaboration, clear ownership boundaries, and measurable outcomes. The team captures decisions, open issues, and handoffs so that knowledge remains discoverable for future programs.</a:t>
+            </a:r>
+          </a:p>
+          <a:p>
+            <a:pPr lvl="1"/>
+            <a:r>
+              <a:t>Section 2: Automation backlog refinement. EMP024 contributes to ast emp024 01 through recurring collaboration, clear ownership boundaries, and measurable outcomes. The team captures decisions, open issues, and handoffs so that knowledge remains discoverable for future programs.</a:t>
+            </a:r>
+          </a:p>
+          <a:p>
+            <a:pPr lvl="1"/>
+            <a:r>
+              <a:t>Section 3: Data quality remediation. EMP024 contributes to ast emp024 01 through recurring collaboration, clear ownership boundaries, and measurable outcomes. The team captures decisions, open issues, and handoffs so that knowledge remains discoverable for future programs.</a:t>
+            </a:r>
+          </a:p>
+        </p:txBody>
+      </p:sp>
+    </p:spTree>
+  </p:cSld>
+  <p:clrMapOvr>
+    <a:masterClrMapping/>
+  </p:clrMapOvr>
+</p:sld>
+</file>
+
+<file path=ppt/slides/slide5.xml><?xml version="1.0" encoding="utf-8"?>
+<p:sld xmlns:a="http://schemas.openxmlformats.org/drawingml/2006/main" xmlns:p="http://schemas.openxmlformats.org/presentationml/2006/main" xmlns:r="http://schemas.openxmlformats.org/officeDocument/2006/relationships">
+  <p:cSld>
+    <p:spTree>
+      <p:nvGrpSpPr>
+        <p:cNvPr id="1" name=""/>
+        <p:cNvGrpSpPr/>
+        <p:nvPr/>
+      </p:nvGrpSpPr>
+      <p:grpSpPr/>
+      <p:sp>
+        <p:nvSpPr>
+          <p:cNvPr id="2" name="Title 1"/>
+          <p:cNvSpPr>
+            <a:spLocks noGrp="1"/>
+          </p:cNvSpPr>
+          <p:nvPr>
+            <p:ph type="title"/>
+          </p:nvPr>
+        </p:nvSpPr>
+        <p:spPr/>
+        <p:txBody>
+          <a:bodyPr/>
+          <a:lstStyle/>
+          <a:p>
+            <a:r>
+              <a:t>Ast Emp024 01 - EMP024</a:t>
+            </a:r>
+          </a:p>
+        </p:txBody>
+      </p:sp>
+      <p:sp>
+        <p:nvSpPr>
+          <p:cNvPr id="3" name="Content Placeholder 2"/>
+          <p:cNvSpPr>
+            <a:spLocks noGrp="1"/>
+          </p:cNvSpPr>
+          <p:nvPr>
+            <p:ph idx="1"/>
+          </p:nvPr>
+        </p:nvSpPr>
+        <p:spPr/>
+        <p:txBody>
+          <a:bodyPr/>
+          <a:lstStyle/>
+          <a:p>
+            <a:r>
+              <a:t>Slide 5: Executive Summary</a:t>
+            </a:r>
+          </a:p>
+          <a:p>
+            <a:pPr lvl="1"/>
+            <a:r>
+              <a:t>Section 1: Customer escalation analysis. EMP024 contributes to ast emp024 01 through recurring collaboration, clear ownership boundaries, and measurable outcomes. The team captures decisions, open issues, and handoffs so that knowledge remains discoverable for future programs.</a:t>
+            </a:r>
+          </a:p>
+          <a:p>
+            <a:pPr lvl="1"/>
+            <a:r>
+              <a:t>Section 2: Fabric semantic model planning. EMP024 contributes to ast emp024 01 through recurring collaboration, clear ownership boundaries, and measurable outcomes. The team captures decisions, open issues, and handoffs so that knowledge remains discoverable for future programs.</a:t>
+            </a:r>
+          </a:p>
+          <a:p>
+            <a:pPr lvl="1"/>
+            <a:r>
+              <a:t>Section 3: Data quality remediation. EMP024 contributes to ast emp024 01 through recurring collaboration, clear ownership boundaries, and measurable outcomes. The team captures decisions, open issues, and handoffs so that knowledge remains discoverable for future programs.</a:t>
             </a:r>
           </a:p>
         </p:txBody>
